--- a/ゲーム科2年/00_前期/ゲーム開発Ⅰ/03_マネージャークラス.pptx
+++ b/ゲーム科2年/00_前期/ゲーム開発Ⅰ/03_マネージャークラス.pptx
@@ -269,7 +269,7 @@
           <a:p>
             <a:fld id="{E9CC885B-4903-4D54-9A93-00025F12DED9}" type="datetimeFigureOut">
               <a:rPr kumimoji="1" lang="ja-JP" altLang="en-US" smtClean="0"/>
-              <a:t>2024/9/16</a:t>
+              <a:t>2025/1/6</a:t>
             </a:fld>
             <a:endParaRPr kumimoji="1" lang="ja-JP" altLang="en-US"/>
           </a:p>
@@ -499,7 +499,7 @@
           <a:p>
             <a:fld id="{E9CC885B-4903-4D54-9A93-00025F12DED9}" type="datetimeFigureOut">
               <a:rPr kumimoji="1" lang="ja-JP" altLang="en-US" smtClean="0"/>
-              <a:t>2024/9/16</a:t>
+              <a:t>2025/1/6</a:t>
             </a:fld>
             <a:endParaRPr kumimoji="1" lang="ja-JP" altLang="en-US"/>
           </a:p>
@@ -739,7 +739,7 @@
           <a:p>
             <a:fld id="{E9CC885B-4903-4D54-9A93-00025F12DED9}" type="datetimeFigureOut">
               <a:rPr kumimoji="1" lang="ja-JP" altLang="en-US" smtClean="0"/>
-              <a:t>2024/9/16</a:t>
+              <a:t>2025/1/6</a:t>
             </a:fld>
             <a:endParaRPr kumimoji="1" lang="ja-JP" altLang="en-US"/>
           </a:p>
@@ -969,7 +969,7 @@
           <a:p>
             <a:fld id="{E9CC885B-4903-4D54-9A93-00025F12DED9}" type="datetimeFigureOut">
               <a:rPr kumimoji="1" lang="ja-JP" altLang="en-US" smtClean="0"/>
-              <a:t>2024/9/16</a:t>
+              <a:t>2025/1/6</a:t>
             </a:fld>
             <a:endParaRPr kumimoji="1" lang="ja-JP" altLang="en-US"/>
           </a:p>
@@ -1244,7 +1244,7 @@
           <a:p>
             <a:fld id="{E9CC885B-4903-4D54-9A93-00025F12DED9}" type="datetimeFigureOut">
               <a:rPr kumimoji="1" lang="ja-JP" altLang="en-US" smtClean="0"/>
-              <a:t>2024/9/16</a:t>
+              <a:t>2025/1/6</a:t>
             </a:fld>
             <a:endParaRPr kumimoji="1" lang="ja-JP" altLang="en-US"/>
           </a:p>
@@ -1573,7 +1573,7 @@
           <a:p>
             <a:fld id="{E9CC885B-4903-4D54-9A93-00025F12DED9}" type="datetimeFigureOut">
               <a:rPr kumimoji="1" lang="ja-JP" altLang="en-US" smtClean="0"/>
-              <a:t>2024/9/16</a:t>
+              <a:t>2025/1/6</a:t>
             </a:fld>
             <a:endParaRPr kumimoji="1" lang="ja-JP" altLang="en-US"/>
           </a:p>
@@ -2049,7 +2049,7 @@
           <a:p>
             <a:fld id="{E9CC885B-4903-4D54-9A93-00025F12DED9}" type="datetimeFigureOut">
               <a:rPr kumimoji="1" lang="ja-JP" altLang="en-US" smtClean="0"/>
-              <a:t>2024/9/16</a:t>
+              <a:t>2025/1/6</a:t>
             </a:fld>
             <a:endParaRPr kumimoji="1" lang="ja-JP" altLang="en-US"/>
           </a:p>
@@ -2190,7 +2190,7 @@
           <a:p>
             <a:fld id="{E9CC885B-4903-4D54-9A93-00025F12DED9}" type="datetimeFigureOut">
               <a:rPr kumimoji="1" lang="ja-JP" altLang="en-US" smtClean="0"/>
-              <a:t>2024/9/16</a:t>
+              <a:t>2025/1/6</a:t>
             </a:fld>
             <a:endParaRPr kumimoji="1" lang="ja-JP" altLang="en-US"/>
           </a:p>
@@ -2303,7 +2303,7 @@
           <a:p>
             <a:fld id="{E9CC885B-4903-4D54-9A93-00025F12DED9}" type="datetimeFigureOut">
               <a:rPr kumimoji="1" lang="ja-JP" altLang="en-US" smtClean="0"/>
-              <a:t>2024/9/16</a:t>
+              <a:t>2025/1/6</a:t>
             </a:fld>
             <a:endParaRPr kumimoji="1" lang="ja-JP" altLang="en-US"/>
           </a:p>
@@ -2646,7 +2646,7 @@
           <a:p>
             <a:fld id="{E9CC885B-4903-4D54-9A93-00025F12DED9}" type="datetimeFigureOut">
               <a:rPr kumimoji="1" lang="ja-JP" altLang="en-US" smtClean="0"/>
-              <a:t>2024/9/16</a:t>
+              <a:t>2025/1/6</a:t>
             </a:fld>
             <a:endParaRPr kumimoji="1" lang="ja-JP" altLang="en-US"/>
           </a:p>
@@ -2934,7 +2934,7 @@
           <a:p>
             <a:fld id="{E9CC885B-4903-4D54-9A93-00025F12DED9}" type="datetimeFigureOut">
               <a:rPr kumimoji="1" lang="ja-JP" altLang="en-US" smtClean="0"/>
-              <a:t>2024/9/16</a:t>
+              <a:t>2025/1/6</a:t>
             </a:fld>
             <a:endParaRPr kumimoji="1" lang="ja-JP" altLang="en-US"/>
           </a:p>
@@ -3207,7 +3207,7 @@
           <a:p>
             <a:fld id="{E9CC885B-4903-4D54-9A93-00025F12DED9}" type="datetimeFigureOut">
               <a:rPr kumimoji="1" lang="ja-JP" altLang="en-US" smtClean="0"/>
-              <a:t>2024/9/16</a:t>
+              <a:t>2025/1/6</a:t>
             </a:fld>
             <a:endParaRPr kumimoji="1" lang="ja-JP" altLang="en-US"/>
           </a:p>
@@ -3737,15 +3737,31 @@
           </a:p>
           <a:p>
             <a:r>
+              <a:rPr lang="ja-JP" altLang="en-US" sz="2400" b="1" dirty="0">
+                <a:solidFill>
+                  <a:srgbClr val="FF0000"/>
+                </a:solidFill>
+              </a:rPr>
+              <a:t>マネージャークラス（管理クラス）</a:t>
+            </a:r>
+            <a:r>
               <a:rPr lang="ja-JP" altLang="en-US" sz="2400" dirty="0"/>
-              <a:t>マネージャークラス（管理クラス）とは、</a:t>
+              <a:t>とは、</a:t>
             </a:r>
             <a:endParaRPr lang="en-US" altLang="ja-JP" sz="2400" dirty="0"/>
           </a:p>
           <a:p>
             <a:r>
+              <a:rPr lang="ja-JP" altLang="en-US" sz="2400" b="1" dirty="0">
+                <a:solidFill>
+                  <a:srgbClr val="FF0000"/>
+                </a:solidFill>
+              </a:rPr>
+              <a:t>オブジェクトの種類ごとに一元管理するクラス</a:t>
+            </a:r>
+            <a:r>
               <a:rPr lang="ja-JP" altLang="en-US" sz="2400" dirty="0"/>
-              <a:t>オブジェクトの種類ごとに、それらを一元管理するクラスで、</a:t>
+              <a:t>で、</a:t>
             </a:r>
             <a:endParaRPr lang="en-US" altLang="ja-JP" sz="2400" dirty="0"/>
           </a:p>
@@ -3999,7 +4015,7 @@
         <p:spPr>
           <a:xfrm>
             <a:off x="567542" y="1216429"/>
-            <a:ext cx="9304150" cy="461665"/>
+            <a:ext cx="9557425" cy="461665"/>
           </a:xfrm>
           <a:prstGeom prst="rect">
             <a:avLst/>
@@ -4013,7 +4029,11 @@
           <a:lstStyle/>
           <a:p>
             <a:r>
-              <a:rPr lang="en-US" altLang="ja-JP" sz="2400" dirty="0" err="1"/>
+              <a:rPr lang="en-US" altLang="ja-JP" sz="2400" b="1" dirty="0" err="1">
+                <a:solidFill>
+                  <a:srgbClr val="00B050"/>
+                </a:solidFill>
+              </a:rPr>
               <a:t>PlayerManager</a:t>
             </a:r>
             <a:r>
@@ -4021,7 +4041,11 @@
               <a:t>を参考にして、</a:t>
             </a:r>
             <a:r>
-              <a:rPr lang="en-US" altLang="ja-JP" sz="2400" dirty="0" err="1"/>
+              <a:rPr lang="en-US" altLang="ja-JP" sz="2400" b="1" dirty="0" err="1">
+                <a:solidFill>
+                  <a:srgbClr val="00B050"/>
+                </a:solidFill>
+              </a:rPr>
               <a:t>CameraManager</a:t>
             </a:r>
             <a:r>
@@ -4113,7 +4137,7 @@
         <p:spPr>
           <a:xfrm>
             <a:off x="567542" y="1216429"/>
-            <a:ext cx="8533105" cy="461665"/>
+            <a:ext cx="8775159" cy="461665"/>
           </a:xfrm>
           <a:prstGeom prst="rect">
             <a:avLst/>
@@ -4127,15 +4151,31 @@
           <a:lstStyle/>
           <a:p>
             <a:r>
-              <a:rPr lang="en-US" altLang="ja-JP" sz="2400" dirty="0"/>
+              <a:rPr lang="en-US" altLang="ja-JP" sz="2400" b="1" dirty="0">
+                <a:solidFill>
+                  <a:srgbClr val="00B050"/>
+                </a:solidFill>
+              </a:rPr>
               <a:t>Player</a:t>
             </a:r>
             <a:r>
+              <a:rPr lang="ja-JP" altLang="en-US" sz="2400" b="1" dirty="0">
+                <a:solidFill>
+                  <a:srgbClr val="00B050"/>
+                </a:solidFill>
+              </a:rPr>
+              <a:t>フォルダ</a:t>
+            </a:r>
+            <a:r>
               <a:rPr lang="ja-JP" altLang="en-US" sz="2400" dirty="0"/>
-              <a:t>フォルダに</a:t>
-            </a:r>
-            <a:r>
-              <a:rPr lang="en-US" altLang="ja-JP" sz="2400" dirty="0"/>
+              <a:t>に</a:t>
+            </a:r>
+            <a:r>
+              <a:rPr lang="en-US" altLang="ja-JP" sz="2400" b="1" dirty="0">
+                <a:solidFill>
+                  <a:srgbClr val="FF0000"/>
+                </a:solidFill>
+              </a:rPr>
               <a:t>PlayerManager.cpp/.h</a:t>
             </a:r>
             <a:r>
@@ -4315,7 +4355,7 @@
         <p:spPr>
           <a:xfrm>
             <a:off x="567542" y="1216429"/>
-            <a:ext cx="5666936" cy="461665"/>
+            <a:ext cx="5809604" cy="461665"/>
           </a:xfrm>
           <a:prstGeom prst="rect">
             <a:avLst/>
@@ -4329,7 +4369,11 @@
           <a:lstStyle/>
           <a:p>
             <a:r>
-              <a:rPr lang="en-US" altLang="ja-JP" sz="2400" dirty="0" err="1"/>
+              <a:rPr lang="en-US" altLang="ja-JP" sz="2400" b="1" dirty="0" err="1">
+                <a:solidFill>
+                  <a:srgbClr val="FF0000"/>
+                </a:solidFill>
+              </a:rPr>
               <a:t>PlayerManager.h</a:t>
             </a:r>
             <a:r>
@@ -4457,7 +4501,7 @@
         <p:spPr>
           <a:xfrm>
             <a:off x="567542" y="1216429"/>
-            <a:ext cx="3512500" cy="461665"/>
+            <a:ext cx="3655168" cy="461665"/>
           </a:xfrm>
           <a:prstGeom prst="rect">
             <a:avLst/>
@@ -4471,7 +4515,11 @@
           <a:lstStyle/>
           <a:p>
             <a:r>
-              <a:rPr lang="en-US" altLang="ja-JP" sz="2400" dirty="0" err="1"/>
+              <a:rPr lang="en-US" altLang="ja-JP" sz="2400" b="1" dirty="0" err="1">
+                <a:solidFill>
+                  <a:srgbClr val="FF0000"/>
+                </a:solidFill>
+              </a:rPr>
               <a:t>PlayerManager.h</a:t>
             </a:r>
             <a:r>
@@ -4599,7 +4647,7 @@
         <p:spPr>
           <a:xfrm>
             <a:off x="567542" y="1216429"/>
-            <a:ext cx="6619120" cy="461665"/>
+            <a:ext cx="6782626" cy="461665"/>
           </a:xfrm>
           <a:prstGeom prst="rect">
             <a:avLst/>
@@ -4613,7 +4661,11 @@
           <a:lstStyle/>
           <a:p>
             <a:r>
-              <a:rPr lang="en-US" altLang="ja-JP" sz="2400" dirty="0"/>
+              <a:rPr lang="en-US" altLang="ja-JP" sz="2400" b="1" dirty="0">
+                <a:solidFill>
+                  <a:srgbClr val="FF0000"/>
+                </a:solidFill>
+              </a:rPr>
               <a:t>PlayerManager.cpp</a:t>
             </a:r>
             <a:r>
@@ -4741,7 +4793,7 @@
         <p:spPr>
           <a:xfrm>
             <a:off x="567542" y="1216429"/>
-            <a:ext cx="3849131" cy="461665"/>
+            <a:ext cx="4012637" cy="461665"/>
           </a:xfrm>
           <a:prstGeom prst="rect">
             <a:avLst/>
@@ -4755,7 +4807,11 @@
           <a:lstStyle/>
           <a:p>
             <a:r>
-              <a:rPr lang="en-US" altLang="ja-JP" sz="2400" dirty="0"/>
+              <a:rPr lang="en-US" altLang="ja-JP" sz="2400" b="1" dirty="0">
+                <a:solidFill>
+                  <a:srgbClr val="FF0000"/>
+                </a:solidFill>
+              </a:rPr>
               <a:t>PlayerManager.cpp</a:t>
             </a:r>
             <a:r>
@@ -4923,7 +4979,7 @@
         <p:spPr>
           <a:xfrm>
             <a:off x="567542" y="1216429"/>
-            <a:ext cx="6947736" cy="830997"/>
+            <a:ext cx="7071167" cy="830997"/>
           </a:xfrm>
           <a:prstGeom prst="rect">
             <a:avLst/>
@@ -4937,7 +4993,11 @@
           <a:lstStyle/>
           <a:p>
             <a:r>
-              <a:rPr lang="en-US" altLang="ja-JP" sz="2400" dirty="0"/>
+              <a:rPr lang="en-US" altLang="ja-JP" sz="2400" b="1" dirty="0">
+                <a:solidFill>
+                  <a:srgbClr val="FF0000"/>
+                </a:solidFill>
+              </a:rPr>
               <a:t>Main.cpp</a:t>
             </a:r>
             <a:r>
@@ -4948,7 +5008,11 @@
           </a:p>
           <a:p>
             <a:r>
-              <a:rPr lang="en-US" altLang="ja-JP" sz="2400" dirty="0" err="1"/>
+              <a:rPr lang="en-US" altLang="ja-JP" sz="2400" b="1" dirty="0" err="1">
+                <a:solidFill>
+                  <a:srgbClr val="00B050"/>
+                </a:solidFill>
+              </a:rPr>
               <a:t>PlayerMangaer</a:t>
             </a:r>
             <a:r>
@@ -5128,7 +5192,7 @@
         <p:spPr>
           <a:xfrm>
             <a:off x="567542" y="1216429"/>
-            <a:ext cx="6160661" cy="461665"/>
+            <a:ext cx="6276077" cy="461665"/>
           </a:xfrm>
           <a:prstGeom prst="rect">
             <a:avLst/>
@@ -5146,7 +5210,11 @@
               <a:t>ループ処理も</a:t>
             </a:r>
             <a:r>
-              <a:rPr lang="en-US" altLang="ja-JP" sz="2400" dirty="0" err="1"/>
+              <a:rPr lang="en-US" altLang="ja-JP" sz="2400" b="1" dirty="0" err="1">
+                <a:solidFill>
+                  <a:srgbClr val="00B050"/>
+                </a:solidFill>
+              </a:rPr>
               <a:t>PlayerManger</a:t>
             </a:r>
             <a:r>
@@ -5430,7 +5498,7 @@
         <p:spPr>
           <a:xfrm>
             <a:off x="567542" y="1216429"/>
-            <a:ext cx="6468437" cy="461665"/>
+            <a:ext cx="6583854" cy="461665"/>
           </a:xfrm>
           <a:prstGeom prst="rect">
             <a:avLst/>
@@ -5448,7 +5516,11 @@
               <a:t>終了処理も</a:t>
             </a:r>
             <a:r>
-              <a:rPr lang="en-US" altLang="ja-JP" sz="2400" dirty="0" err="1"/>
+              <a:rPr lang="en-US" altLang="ja-JP" sz="2400" b="1" dirty="0" err="1">
+                <a:solidFill>
+                  <a:srgbClr val="00B050"/>
+                </a:solidFill>
+              </a:rPr>
               <a:t>PlayerManger</a:t>
             </a:r>
             <a:r>
